--- a/Topology_Task/ppt/msc_thesis_MARL.pptx
+++ b/Topology_Task/ppt/msc_thesis_MARL.pptx
@@ -1648,19 +1648,7 @@
             <a:rPr lang="fr-CH" altLang="fr-FR" sz="1100" dirty="0">
               <a:latin typeface="Arial" panose="020B0604020202020204" pitchFamily="34" charset="0"/>
             </a:rPr>
-            <a:t> </a:t>
-          </a:r>
-          <a:r>
-            <a:rPr lang="fr-CH" altLang="fr-FR" sz="1100" dirty="0" err="1">
-              <a:latin typeface="Arial" panose="020B0604020202020204" pitchFamily="34" charset="0"/>
-            </a:rPr>
-            <a:t>Comapre</a:t>
-          </a:r>
-          <a:r>
-            <a:rPr lang="fr-CH" altLang="fr-FR" sz="1100" dirty="0">
-              <a:latin typeface="Arial" panose="020B0604020202020204" pitchFamily="34" charset="0"/>
-            </a:rPr>
-            <a:t> vs MLP</a:t>
+            <a:t> Compare vs MLP</a:t>
           </a:r>
           <a:endParaRPr lang="fr-FR" sz="1100" dirty="0"/>
         </a:p>
@@ -2299,19 +2287,7 @@
             <a:rPr lang="fr-CH" altLang="fr-FR" sz="1100" kern="1200" dirty="0">
               <a:latin typeface="Arial" panose="020B0604020202020204" pitchFamily="34" charset="0"/>
             </a:rPr>
-            <a:t> </a:t>
-          </a:r>
-          <a:r>
-            <a:rPr lang="fr-CH" altLang="fr-FR" sz="1100" kern="1200" dirty="0" err="1">
-              <a:latin typeface="Arial" panose="020B0604020202020204" pitchFamily="34" charset="0"/>
-            </a:rPr>
-            <a:t>Comapre</a:t>
-          </a:r>
-          <a:r>
-            <a:rPr lang="fr-CH" altLang="fr-FR" sz="1100" kern="1200" dirty="0">
-              <a:latin typeface="Arial" panose="020B0604020202020204" pitchFamily="34" charset="0"/>
-            </a:rPr>
-            <a:t> vs MLP</a:t>
+            <a:t> Compare vs MLP</a:t>
           </a:r>
           <a:endParaRPr lang="fr-FR" sz="1100" kern="1200" dirty="0"/>
         </a:p>
@@ -4094,7 +4070,7 @@
               <a:rPr lang="fr-CH" smtClean="0">
                 <a:latin typeface="Arial" panose="020B0604020202020204" pitchFamily="34" charset="0"/>
               </a:rPr>
-              <a:t>22.04.26</a:t>
+              <a:t>06.05.26</a:t>
             </a:fld>
             <a:endParaRPr lang="fr-CH">
               <a:latin typeface="Arial" panose="020B0604020202020204" pitchFamily="34" charset="0"/>
@@ -4278,7 +4254,7 @@
           <a:p>
             <a:fld id="{3701F3EA-C8BD-D544-8519-665215575D25}" type="datetime1">
               <a:rPr lang="fr-CH" smtClean="0"/>
-              <a:t>22.04.26</a:t>
+              <a:t>06.05.26</a:t>
             </a:fld>
             <a:endParaRPr lang="fr-FR"/>
           </a:p>
@@ -5256,7 +5232,7 @@
           <a:p>
             <a:fld id="{A543D6B9-C04C-0640-9F0E-12EE3DC37A82}" type="datetime1">
               <a:rPr lang="fr-CH" smtClean="0"/>
-              <a:t>23.04.26</a:t>
+              <a:t>06.05.26</a:t>
             </a:fld>
             <a:endParaRPr lang="fr-FR"/>
           </a:p>
@@ -5886,7 +5862,7 @@
           <a:p>
             <a:fld id="{3701F3EA-C8BD-D544-8519-665215575D25}" type="datetime1">
               <a:rPr lang="fr-CH" smtClean="0"/>
-              <a:t>23.04.26</a:t>
+              <a:t>06.05.26</a:t>
             </a:fld>
             <a:endParaRPr lang="fr-FR"/>
           </a:p>
@@ -8527,7 +8503,7 @@
           <a:p>
             <a:fld id="{3701F3EA-C8BD-D544-8519-665215575D25}" type="datetime1">
               <a:rPr lang="fr-CH" smtClean="0"/>
-              <a:t>23.04.26</a:t>
+              <a:t>06.05.26</a:t>
             </a:fld>
             <a:endParaRPr lang="fr-FR"/>
           </a:p>
@@ -10138,7 +10114,7 @@
           <a:p>
             <a:fld id="{3701F3EA-C8BD-D544-8519-665215575D25}" type="datetime1">
               <a:rPr lang="fr-CH" smtClean="0"/>
-              <a:t>23.04.26</a:t>
+              <a:t>06.05.26</a:t>
             </a:fld>
             <a:endParaRPr lang="fr-FR"/>
           </a:p>
@@ -10295,7 +10271,7 @@
           <a:p>
             <a:fld id="{3701F3EA-C8BD-D544-8519-665215575D25}" type="datetime1">
               <a:rPr lang="fr-CH" smtClean="0"/>
-              <a:t>23.04.26</a:t>
+              <a:t>06.05.26</a:t>
             </a:fld>
             <a:endParaRPr lang="fr-FR"/>
           </a:p>
@@ -11938,7 +11914,7 @@
           <a:p>
             <a:fld id="{3701F3EA-C8BD-D544-8519-665215575D25}" type="datetime1">
               <a:rPr lang="fr-CH" smtClean="0"/>
-              <a:t>23.04.26</a:t>
+              <a:t>06.05.26</a:t>
             </a:fld>
             <a:endParaRPr lang="fr-FR"/>
           </a:p>
@@ -13146,7 +13122,7 @@
           <a:p>
             <a:fld id="{3701F3EA-C8BD-D544-8519-665215575D25}" type="datetime1">
               <a:rPr lang="fr-CH" smtClean="0"/>
-              <a:t>23.04.26</a:t>
+              <a:t>06.05.26</a:t>
             </a:fld>
             <a:endParaRPr lang="fr-FR"/>
           </a:p>
@@ -15192,7 +15168,7 @@
           <a:p>
             <a:fld id="{3701F3EA-C8BD-D544-8519-665215575D25}" type="datetime1">
               <a:rPr lang="fr-CH" smtClean="0"/>
-              <a:t>23.04.26</a:t>
+              <a:t>06.05.26</a:t>
             </a:fld>
             <a:endParaRPr lang="fr-FR"/>
           </a:p>
@@ -16085,7 +16061,7 @@
           <a:p>
             <a:fld id="{3701F3EA-C8BD-D544-8519-665215575D25}" type="datetime1">
               <a:rPr lang="fr-CH" smtClean="0"/>
-              <a:t>23.04.26</a:t>
+              <a:t>06.05.26</a:t>
             </a:fld>
             <a:endParaRPr lang="fr-FR"/>
           </a:p>
@@ -18122,7 +18098,7 @@
           <a:p>
             <a:fld id="{3701F3EA-C8BD-D544-8519-665215575D25}" type="datetime1">
               <a:rPr lang="fr-CH" smtClean="0"/>
-              <a:t>23.04.26</a:t>
+              <a:t>06.05.26</a:t>
             </a:fld>
             <a:endParaRPr lang="fr-FR"/>
           </a:p>
@@ -19178,7 +19154,7 @@
           <a:p>
             <a:fld id="{3701F3EA-C8BD-D544-8519-665215575D25}" type="datetime1">
               <a:rPr lang="fr-CH" smtClean="0"/>
-              <a:t>23.04.26</a:t>
+              <a:t>06.05.26</a:t>
             </a:fld>
             <a:endParaRPr lang="fr-FR"/>
           </a:p>
@@ -19968,7 +19944,7 @@
           <a:p>
             <a:fld id="{3701F3EA-C8BD-D544-8519-665215575D25}" type="datetime1">
               <a:rPr lang="fr-CH" smtClean="0"/>
-              <a:t>23.04.26</a:t>
+              <a:t>06.05.26</a:t>
             </a:fld>
             <a:endParaRPr lang="fr-FR"/>
           </a:p>
@@ -21757,7 +21733,7 @@
           <a:p>
             <a:fld id="{3701F3EA-C8BD-D544-8519-665215575D25}" type="datetime1">
               <a:rPr lang="fr-CH" smtClean="0"/>
-              <a:t>23.04.26</a:t>
+              <a:t>06.05.26</a:t>
             </a:fld>
             <a:endParaRPr lang="fr-FR"/>
           </a:p>
@@ -27347,7 +27323,7 @@
           <p:nvPr>
             <p:extLst>
               <p:ext uri="{D42A27DB-BD31-4B8C-83A1-F6EECF244321}">
-                <p14:modId xmlns:p14="http://schemas.microsoft.com/office/powerpoint/2010/main" val="1660148791"/>
+                <p14:modId xmlns:p14="http://schemas.microsoft.com/office/powerpoint/2010/main" val="2696030416"/>
               </p:ext>
             </p:extLst>
           </p:nvPr>
